--- a/Fase 2/Evidencias Grupales/Proyecto Campus Seguro - Presentación Capstone (1).pptx
+++ b/Fase 2/Evidencias Grupales/Proyecto Campus Seguro - Presentación Capstone (1).pptx
@@ -318,7 +318,7 @@
       </p15:sldGuideLst>
     </p:ext>
     <p:ext uri="GoogleSlidesCustomDataVersion2">
-      <go:slidesCustomData xmlns:go="http://customooxmlschemas.google.com/" r:id="rId48" roundtripDataSignature="AMtx7miCVqugm3HnqJWbT9eH1FP1bsXrIw=="/>
+      <go:slidesCustomData xmlns:go="http://customooxmlschemas.google.com/" r:id="rId48" roundtripDataSignature="AMtx7mi15zvxy9qVM3TH9w+ll5/vPcvMHg=="/>
     </p:ext>
   </p:extLst>
 </p:presentation>
@@ -17341,7 +17341,7 @@
         </p:nvSpPr>
         <p:spPr>
           <a:xfrm>
-            <a:off x="1176337" y="1219200"/>
+            <a:off x="1062037" y="0"/>
             <a:ext cx="10766400" cy="369300"/>
           </a:xfrm>
           <a:prstGeom prst="rect">
@@ -17640,8 +17640,8 @@
         </p:blipFill>
         <p:spPr>
           <a:xfrm>
-            <a:off x="2262992" y="1676400"/>
-            <a:ext cx="7666019" cy="4476750"/>
+            <a:off x="528000" y="369301"/>
+            <a:ext cx="11135990" cy="6503126"/>
           </a:xfrm>
           <a:prstGeom prst="rect">
             <a:avLst/>
@@ -35185,7 +35185,19 @@
                 <a:cs typeface="Inter SemiBold"/>
                 <a:sym typeface="Inter SemiBold"/>
               </a:rPr>
-              <a:t>SEMANAS 1-6</a:t>
+              <a:t>SEMANA</a:t>
+            </a:r>
+            <a:r>
+              <a:rPr lang="en-US" sz="1425">
+                <a:solidFill>
+                  <a:srgbClr val="2563EB"/>
+                </a:solidFill>
+                <a:latin typeface="Inter SemiBold"/>
+                <a:ea typeface="Inter SemiBold"/>
+                <a:cs typeface="Inter SemiBold"/>
+                <a:sym typeface="Inter SemiBold"/>
+              </a:rPr>
+              <a:t> 7 - 9</a:t>
             </a:r>
             <a:endParaRPr b="0" i="0" sz="2000" u="none" cap="none" strike="noStrike">
               <a:solidFill>
@@ -35317,7 +35329,19 @@
                 <a:cs typeface="Inter SemiBold"/>
                 <a:sym typeface="Inter SemiBold"/>
               </a:rPr>
-              <a:t>SEMANAS 7-12</a:t>
+              <a:t>SEMANA</a:t>
+            </a:r>
+            <a:r>
+              <a:rPr lang="en-US" sz="1425">
+                <a:solidFill>
+                  <a:srgbClr val="2563EB"/>
+                </a:solidFill>
+                <a:latin typeface="Inter SemiBold"/>
+                <a:ea typeface="Inter SemiBold"/>
+                <a:cs typeface="Inter SemiBold"/>
+                <a:sym typeface="Inter SemiBold"/>
+              </a:rPr>
+              <a:t> 10 - 12</a:t>
             </a:r>
             <a:endParaRPr b="0" i="0" sz="2000" u="none" cap="none" strike="noStrike">
               <a:solidFill>
@@ -35449,7 +35473,7 @@
                 <a:cs typeface="Inter SemiBold"/>
                 <a:sym typeface="Inter SemiBold"/>
               </a:rPr>
-              <a:t>SEMANAS 13-18</a:t>
+              <a:t>SEMANA 13 - 15</a:t>
             </a:r>
             <a:endParaRPr b="0" i="0" sz="2000" u="none" cap="none" strike="noStrike">
               <a:solidFill>
@@ -36218,6 +36242,285 @@
 </file>
 
 <file path=ppt/theme/theme1.xml><?xml version="1.0" encoding="utf-8"?>
+<a:theme xmlns:a="http://schemas.openxmlformats.org/drawingml/2006/main" xmlns:r="http://schemas.openxmlformats.org/officeDocument/2006/relationships" name="Office Theme">
+  <a:themeElements>
+    <a:clrScheme name="Office">
+      <a:dk1>
+        <a:srgbClr val="000000"/>
+      </a:dk1>
+      <a:lt1>
+        <a:srgbClr val="FFFFFF"/>
+      </a:lt1>
+      <a:dk2>
+        <a:srgbClr val="1F497D"/>
+      </a:dk2>
+      <a:lt2>
+        <a:srgbClr val="EEECE1"/>
+      </a:lt2>
+      <a:accent1>
+        <a:srgbClr val="4F81BD"/>
+      </a:accent1>
+      <a:accent2>
+        <a:srgbClr val="C0504D"/>
+      </a:accent2>
+      <a:accent3>
+        <a:srgbClr val="9BBB59"/>
+      </a:accent3>
+      <a:accent4>
+        <a:srgbClr val="8064A2"/>
+      </a:accent4>
+      <a:accent5>
+        <a:srgbClr val="4BACC6"/>
+      </a:accent5>
+      <a:accent6>
+        <a:srgbClr val="F79646"/>
+      </a:accent6>
+      <a:hlink>
+        <a:srgbClr val="0000FF"/>
+      </a:hlink>
+      <a:folHlink>
+        <a:srgbClr val="800080"/>
+      </a:folHlink>
+    </a:clrScheme>
+    <a:fontScheme name="Office">
+      <a:majorFont>
+        <a:latin typeface="Arial"/>
+        <a:ea typeface=""/>
+        <a:cs typeface=""/>
+        <a:font script="Jpan" typeface="ＭＳ Ｐゴシック"/>
+        <a:font script="Hang" typeface="맑은 고딕"/>
+        <a:font script="Hans" typeface="宋体"/>
+        <a:font script="Hant" typeface="新細明體"/>
+        <a:font script="Arab" typeface="Times New Roman"/>
+        <a:font script="Hebr" typeface="Times New Roman"/>
+        <a:font script="Thai" typeface="Angsana New"/>
+        <a:font script="Ethi" typeface="Nyala"/>
+        <a:font script="Beng" typeface="Vrinda"/>
+        <a:font script="Gujr" typeface="Shruti"/>
+        <a:font script="Khmr" typeface="MoolBoran"/>
+        <a:font script="Knda" typeface="Tunga"/>
+        <a:font script="Guru" typeface="Raavi"/>
+        <a:font script="Cans" typeface="Euphemia"/>
+        <a:font script="Cher" typeface="Plantagenet Cherokee"/>
+        <a:font script="Yiii" typeface="Microsoft Yi Baiti"/>
+        <a:font script="Tibt" typeface="Microsoft Himalaya"/>
+        <a:font script="Thaa" typeface="MV Boli"/>
+        <a:font script="Deva" typeface="Mangal"/>
+        <a:font script="Telu" typeface="Gautami"/>
+        <a:font script="Taml" typeface="Latha"/>
+        <a:font script="Syrc" typeface="Estrangelo Edessa"/>
+        <a:font script="Orya" typeface="Kalinga"/>
+        <a:font script="Mlym" typeface="Kartika"/>
+        <a:font script="Laoo" typeface="DokChampa"/>
+        <a:font script="Sinh" typeface="Iskoola Pota"/>
+        <a:font script="Mong" typeface="Mongolian Baiti"/>
+        <a:font script="Viet" typeface="Times New Roman"/>
+        <a:font script="Uigh" typeface="Microsoft Uighur"/>
+        <a:font script="Geor" typeface="Sylfaen"/>
+      </a:majorFont>
+      <a:minorFont>
+        <a:latin typeface="Arial"/>
+        <a:ea typeface=""/>
+        <a:cs typeface=""/>
+        <a:font script="Jpan" typeface="ＭＳ Ｐゴシック"/>
+        <a:font script="Hang" typeface="맑은 고딕"/>
+        <a:font script="Hans" typeface="宋体"/>
+        <a:font script="Hant" typeface="新細明體"/>
+        <a:font script="Arab" typeface="Arial"/>
+        <a:font script="Hebr" typeface="Arial"/>
+        <a:font script="Thai" typeface="Cordia New"/>
+        <a:font script="Ethi" typeface="Nyala"/>
+        <a:font script="Beng" typeface="Vrinda"/>
+        <a:font script="Gujr" typeface="Shruti"/>
+        <a:font script="Khmr" typeface="DaunPenh"/>
+        <a:font script="Knda" typeface="Tunga"/>
+        <a:font script="Guru" typeface="Raavi"/>
+        <a:font script="Cans" typeface="Euphemia"/>
+        <a:font script="Cher" typeface="Plantagenet Cherokee"/>
+        <a:font script="Yiii" typeface="Microsoft Yi Baiti"/>
+        <a:font script="Tibt" typeface="Microsoft Himalaya"/>
+        <a:font script="Thaa" typeface="MV Boli"/>
+        <a:font script="Deva" typeface="Mangal"/>
+        <a:font script="Telu" typeface="Gautami"/>
+        <a:font script="Taml" typeface="Latha"/>
+        <a:font script="Syrc" typeface="Estrangelo Edessa"/>
+        <a:font script="Orya" typeface="Kalinga"/>
+        <a:font script="Mlym" typeface="Kartika"/>
+        <a:font script="Laoo" typeface="DokChampa"/>
+        <a:font script="Sinh" typeface="Iskoola Pota"/>
+        <a:font script="Mong" typeface="Mongolian Baiti"/>
+        <a:font script="Viet" typeface="Arial"/>
+        <a:font script="Uigh" typeface="Microsoft Uighur"/>
+        <a:font script="Geor" typeface="Sylfaen"/>
+      </a:minorFont>
+    </a:fontScheme>
+    <a:fmtScheme name="Office">
+      <a:fillStyleLst>
+        <a:solidFill>
+          <a:schemeClr val="phClr"/>
+        </a:solidFill>
+        <a:gradFill rotWithShape="1">
+          <a:gsLst>
+            <a:gs pos="0">
+              <a:schemeClr val="phClr">
+                <a:tint val="50000"/>
+                <a:satMod val="300000"/>
+              </a:schemeClr>
+            </a:gs>
+            <a:gs pos="35000">
+              <a:schemeClr val="phClr">
+                <a:tint val="37000"/>
+                <a:satMod val="300000"/>
+              </a:schemeClr>
+            </a:gs>
+            <a:gs pos="100000">
+              <a:schemeClr val="phClr">
+                <a:tint val="15000"/>
+                <a:satMod val="350000"/>
+              </a:schemeClr>
+            </a:gs>
+          </a:gsLst>
+          <a:lin ang="16200000" scaled="1"/>
+        </a:gradFill>
+        <a:gradFill rotWithShape="1">
+          <a:gsLst>
+            <a:gs pos="0">
+              <a:schemeClr val="phClr">
+                <a:tint val="100000"/>
+                <a:shade val="100000"/>
+                <a:satMod val="130000"/>
+              </a:schemeClr>
+            </a:gs>
+            <a:gs pos="100000">
+              <a:schemeClr val="phClr">
+                <a:tint val="50000"/>
+                <a:shade val="100000"/>
+                <a:satMod val="350000"/>
+              </a:schemeClr>
+            </a:gs>
+          </a:gsLst>
+          <a:lin ang="16200000" scaled="0"/>
+        </a:gradFill>
+      </a:fillStyleLst>
+      <a:lnStyleLst>
+        <a:ln w="9525" cap="flat" cmpd="sng" algn="ctr">
+          <a:solidFill>
+            <a:schemeClr val="phClr">
+              <a:shade val="95000"/>
+              <a:satMod val="105000"/>
+            </a:schemeClr>
+          </a:solidFill>
+          <a:prstDash val="solid"/>
+        </a:ln>
+        <a:ln w="25400" cap="flat" cmpd="sng" algn="ctr">
+          <a:solidFill>
+            <a:schemeClr val="phClr"/>
+          </a:solidFill>
+          <a:prstDash val="solid"/>
+        </a:ln>
+        <a:ln w="38100" cap="flat" cmpd="sng" algn="ctr">
+          <a:solidFill>
+            <a:schemeClr val="phClr"/>
+          </a:solidFill>
+          <a:prstDash val="solid"/>
+        </a:ln>
+      </a:lnStyleLst>
+      <a:effectStyleLst>
+        <a:effectStyle>
+          <a:effectLst>
+            <a:outerShdw blurRad="40000" dist="20000" dir="5400000" rotWithShape="0">
+              <a:srgbClr val="000000">
+                <a:alpha val="38000"/>
+              </a:srgbClr>
+            </a:outerShdw>
+          </a:effectLst>
+        </a:effectStyle>
+        <a:effectStyle>
+          <a:effectLst>
+            <a:outerShdw blurRad="40000" dist="23000" dir="5400000" rotWithShape="0">
+              <a:srgbClr val="000000">
+                <a:alpha val="35000"/>
+              </a:srgbClr>
+            </a:outerShdw>
+          </a:effectLst>
+        </a:effectStyle>
+        <a:effectStyle>
+          <a:effectLst>
+            <a:outerShdw blurRad="40000" dist="23000" dir="5400000" rotWithShape="0">
+              <a:srgbClr val="000000">
+                <a:alpha val="35000"/>
+              </a:srgbClr>
+            </a:outerShdw>
+          </a:effectLst>
+          <a:scene3d>
+            <a:camera prst="orthographicFront">
+              <a:rot lat="0" lon="0" rev="0"/>
+            </a:camera>
+            <a:lightRig rig="threePt" dir="t">
+              <a:rot lat="0" lon="0" rev="1200000"/>
+            </a:lightRig>
+          </a:scene3d>
+          <a:sp3d>
+            <a:bevelT w="63500" h="25400"/>
+          </a:sp3d>
+        </a:effectStyle>
+      </a:effectStyleLst>
+      <a:bgFillStyleLst>
+        <a:solidFill>
+          <a:schemeClr val="phClr"/>
+        </a:solidFill>
+        <a:gradFill rotWithShape="1">
+          <a:gsLst>
+            <a:gs pos="0">
+              <a:schemeClr val="phClr">
+                <a:tint val="40000"/>
+                <a:satMod val="350000"/>
+              </a:schemeClr>
+            </a:gs>
+            <a:gs pos="40000">
+              <a:schemeClr val="phClr">
+                <a:tint val="45000"/>
+                <a:shade val="99000"/>
+                <a:satMod val="350000"/>
+              </a:schemeClr>
+            </a:gs>
+            <a:gs pos="100000">
+              <a:schemeClr val="phClr">
+                <a:shade val="20000"/>
+                <a:satMod val="255000"/>
+              </a:schemeClr>
+            </a:gs>
+          </a:gsLst>
+          <a:path path="circle">
+            <a:fillToRect l="50000" t="-80000" r="50000" b="180000"/>
+          </a:path>
+        </a:gradFill>
+        <a:gradFill rotWithShape="1">
+          <a:gsLst>
+            <a:gs pos="0">
+              <a:schemeClr val="phClr">
+                <a:tint val="80000"/>
+                <a:satMod val="300000"/>
+              </a:schemeClr>
+            </a:gs>
+            <a:gs pos="100000">
+              <a:schemeClr val="phClr">
+                <a:shade val="30000"/>
+                <a:satMod val="200000"/>
+              </a:schemeClr>
+            </a:gs>
+          </a:gsLst>
+          <a:path path="circle">
+            <a:fillToRect l="50000" t="50000" r="50000" b="50000"/>
+          </a:path>
+        </a:gradFill>
+      </a:bgFillStyleLst>
+    </a:fmtScheme>
+  </a:themeElements>
+</a:theme>
+</file>
+
+<file path=ppt/theme/theme2.xml><?xml version="1.0" encoding="utf-8"?>
 <a:theme xmlns:a="http://schemas.openxmlformats.org/drawingml/2006/main" xmlns:r="http://schemas.openxmlformats.org/officeDocument/2006/relationships">
   <a:themeElements>
     <a:clrScheme name="Default">
@@ -36494,283 +36797,4 @@
     </a:fmtScheme>
   </a:themeElements>
 </a:theme>
-</file>
-
-<file path=ppt/theme/theme2.xml><?xml version="1.0" encoding="utf-8"?>
-<a:theme xmlns:a="http://schemas.openxmlformats.org/drawingml/2006/main" xmlns:r="http://schemas.openxmlformats.org/officeDocument/2006/relationships" name="Office Theme">
-  <a:themeElements>
-    <a:clrScheme name="Office">
-      <a:dk1>
-        <a:srgbClr val="000000"/>
-      </a:dk1>
-      <a:lt1>
-        <a:srgbClr val="FFFFFF"/>
-      </a:lt1>
-      <a:dk2>
-        <a:srgbClr val="1F497D"/>
-      </a:dk2>
-      <a:lt2>
-        <a:srgbClr val="EEECE1"/>
-      </a:lt2>
-      <a:accent1>
-        <a:srgbClr val="4F81BD"/>
-      </a:accent1>
-      <a:accent2>
-        <a:srgbClr val="C0504D"/>
-      </a:accent2>
-      <a:accent3>
-        <a:srgbClr val="9BBB59"/>
-      </a:accent3>
-      <a:accent4>
-        <a:srgbClr val="8064A2"/>
-      </a:accent4>
-      <a:accent5>
-        <a:srgbClr val="4BACC6"/>
-      </a:accent5>
-      <a:accent6>
-        <a:srgbClr val="F79646"/>
-      </a:accent6>
-      <a:hlink>
-        <a:srgbClr val="0000FF"/>
-      </a:hlink>
-      <a:folHlink>
-        <a:srgbClr val="800080"/>
-      </a:folHlink>
-    </a:clrScheme>
-    <a:fontScheme name="Office">
-      <a:majorFont>
-        <a:latin typeface="Arial"/>
-        <a:ea typeface=""/>
-        <a:cs typeface=""/>
-        <a:font script="Jpan" typeface="ＭＳ Ｐゴシック"/>
-        <a:font script="Hang" typeface="맑은 고딕"/>
-        <a:font script="Hans" typeface="宋体"/>
-        <a:font script="Hant" typeface="新細明體"/>
-        <a:font script="Arab" typeface="Times New Roman"/>
-        <a:font script="Hebr" typeface="Times New Roman"/>
-        <a:font script="Thai" typeface="Angsana New"/>
-        <a:font script="Ethi" typeface="Nyala"/>
-        <a:font script="Beng" typeface="Vrinda"/>
-        <a:font script="Gujr" typeface="Shruti"/>
-        <a:font script="Khmr" typeface="MoolBoran"/>
-        <a:font script="Knda" typeface="Tunga"/>
-        <a:font script="Guru" typeface="Raavi"/>
-        <a:font script="Cans" typeface="Euphemia"/>
-        <a:font script="Cher" typeface="Plantagenet Cherokee"/>
-        <a:font script="Yiii" typeface="Microsoft Yi Baiti"/>
-        <a:font script="Tibt" typeface="Microsoft Himalaya"/>
-        <a:font script="Thaa" typeface="MV Boli"/>
-        <a:font script="Deva" typeface="Mangal"/>
-        <a:font script="Telu" typeface="Gautami"/>
-        <a:font script="Taml" typeface="Latha"/>
-        <a:font script="Syrc" typeface="Estrangelo Edessa"/>
-        <a:font script="Orya" typeface="Kalinga"/>
-        <a:font script="Mlym" typeface="Kartika"/>
-        <a:font script="Laoo" typeface="DokChampa"/>
-        <a:font script="Sinh" typeface="Iskoola Pota"/>
-        <a:font script="Mong" typeface="Mongolian Baiti"/>
-        <a:font script="Viet" typeface="Times New Roman"/>
-        <a:font script="Uigh" typeface="Microsoft Uighur"/>
-        <a:font script="Geor" typeface="Sylfaen"/>
-      </a:majorFont>
-      <a:minorFont>
-        <a:latin typeface="Arial"/>
-        <a:ea typeface=""/>
-        <a:cs typeface=""/>
-        <a:font script="Jpan" typeface="ＭＳ Ｐゴシック"/>
-        <a:font script="Hang" typeface="맑은 고딕"/>
-        <a:font script="Hans" typeface="宋体"/>
-        <a:font script="Hant" typeface="新細明體"/>
-        <a:font script="Arab" typeface="Arial"/>
-        <a:font script="Hebr" typeface="Arial"/>
-        <a:font script="Thai" typeface="Cordia New"/>
-        <a:font script="Ethi" typeface="Nyala"/>
-        <a:font script="Beng" typeface="Vrinda"/>
-        <a:font script="Gujr" typeface="Shruti"/>
-        <a:font script="Khmr" typeface="DaunPenh"/>
-        <a:font script="Knda" typeface="Tunga"/>
-        <a:font script="Guru" typeface="Raavi"/>
-        <a:font script="Cans" typeface="Euphemia"/>
-        <a:font script="Cher" typeface="Plantagenet Cherokee"/>
-        <a:font script="Yiii" typeface="Microsoft Yi Baiti"/>
-        <a:font script="Tibt" typeface="Microsoft Himalaya"/>
-        <a:font script="Thaa" typeface="MV Boli"/>
-        <a:font script="Deva" typeface="Mangal"/>
-        <a:font script="Telu" typeface="Gautami"/>
-        <a:font script="Taml" typeface="Latha"/>
-        <a:font script="Syrc" typeface="Estrangelo Edessa"/>
-        <a:font script="Orya" typeface="Kalinga"/>
-        <a:font script="Mlym" typeface="Kartika"/>
-        <a:font script="Laoo" typeface="DokChampa"/>
-        <a:font script="Sinh" typeface="Iskoola Pota"/>
-        <a:font script="Mong" typeface="Mongolian Baiti"/>
-        <a:font script="Viet" typeface="Arial"/>
-        <a:font script="Uigh" typeface="Microsoft Uighur"/>
-        <a:font script="Geor" typeface="Sylfaen"/>
-      </a:minorFont>
-    </a:fontScheme>
-    <a:fmtScheme name="Office">
-      <a:fillStyleLst>
-        <a:solidFill>
-          <a:schemeClr val="phClr"/>
-        </a:solidFill>
-        <a:gradFill rotWithShape="1">
-          <a:gsLst>
-            <a:gs pos="0">
-              <a:schemeClr val="phClr">
-                <a:tint val="50000"/>
-                <a:satMod val="300000"/>
-              </a:schemeClr>
-            </a:gs>
-            <a:gs pos="35000">
-              <a:schemeClr val="phClr">
-                <a:tint val="37000"/>
-                <a:satMod val="300000"/>
-              </a:schemeClr>
-            </a:gs>
-            <a:gs pos="100000">
-              <a:schemeClr val="phClr">
-                <a:tint val="15000"/>
-                <a:satMod val="350000"/>
-              </a:schemeClr>
-            </a:gs>
-          </a:gsLst>
-          <a:lin ang="16200000" scaled="1"/>
-        </a:gradFill>
-        <a:gradFill rotWithShape="1">
-          <a:gsLst>
-            <a:gs pos="0">
-              <a:schemeClr val="phClr">
-                <a:tint val="100000"/>
-                <a:shade val="100000"/>
-                <a:satMod val="130000"/>
-              </a:schemeClr>
-            </a:gs>
-            <a:gs pos="100000">
-              <a:schemeClr val="phClr">
-                <a:tint val="50000"/>
-                <a:shade val="100000"/>
-                <a:satMod val="350000"/>
-              </a:schemeClr>
-            </a:gs>
-          </a:gsLst>
-          <a:lin ang="16200000" scaled="0"/>
-        </a:gradFill>
-      </a:fillStyleLst>
-      <a:lnStyleLst>
-        <a:ln w="9525" cap="flat" cmpd="sng" algn="ctr">
-          <a:solidFill>
-            <a:schemeClr val="phClr">
-              <a:shade val="95000"/>
-              <a:satMod val="105000"/>
-            </a:schemeClr>
-          </a:solidFill>
-          <a:prstDash val="solid"/>
-        </a:ln>
-        <a:ln w="25400" cap="flat" cmpd="sng" algn="ctr">
-          <a:solidFill>
-            <a:schemeClr val="phClr"/>
-          </a:solidFill>
-          <a:prstDash val="solid"/>
-        </a:ln>
-        <a:ln w="38100" cap="flat" cmpd="sng" algn="ctr">
-          <a:solidFill>
-            <a:schemeClr val="phClr"/>
-          </a:solidFill>
-          <a:prstDash val="solid"/>
-        </a:ln>
-      </a:lnStyleLst>
-      <a:effectStyleLst>
-        <a:effectStyle>
-          <a:effectLst>
-            <a:outerShdw blurRad="40000" dist="20000" dir="5400000" rotWithShape="0">
-              <a:srgbClr val="000000">
-                <a:alpha val="38000"/>
-              </a:srgbClr>
-            </a:outerShdw>
-          </a:effectLst>
-        </a:effectStyle>
-        <a:effectStyle>
-          <a:effectLst>
-            <a:outerShdw blurRad="40000" dist="23000" dir="5400000" rotWithShape="0">
-              <a:srgbClr val="000000">
-                <a:alpha val="35000"/>
-              </a:srgbClr>
-            </a:outerShdw>
-          </a:effectLst>
-        </a:effectStyle>
-        <a:effectStyle>
-          <a:effectLst>
-            <a:outerShdw blurRad="40000" dist="23000" dir="5400000" rotWithShape="0">
-              <a:srgbClr val="000000">
-                <a:alpha val="35000"/>
-              </a:srgbClr>
-            </a:outerShdw>
-          </a:effectLst>
-          <a:scene3d>
-            <a:camera prst="orthographicFront">
-              <a:rot lat="0" lon="0" rev="0"/>
-            </a:camera>
-            <a:lightRig rig="threePt" dir="t">
-              <a:rot lat="0" lon="0" rev="1200000"/>
-            </a:lightRig>
-          </a:scene3d>
-          <a:sp3d>
-            <a:bevelT w="63500" h="25400"/>
-          </a:sp3d>
-        </a:effectStyle>
-      </a:effectStyleLst>
-      <a:bgFillStyleLst>
-        <a:solidFill>
-          <a:schemeClr val="phClr"/>
-        </a:solidFill>
-        <a:gradFill rotWithShape="1">
-          <a:gsLst>
-            <a:gs pos="0">
-              <a:schemeClr val="phClr">
-                <a:tint val="40000"/>
-                <a:satMod val="350000"/>
-              </a:schemeClr>
-            </a:gs>
-            <a:gs pos="40000">
-              <a:schemeClr val="phClr">
-                <a:tint val="45000"/>
-                <a:shade val="99000"/>
-                <a:satMod val="350000"/>
-              </a:schemeClr>
-            </a:gs>
-            <a:gs pos="100000">
-              <a:schemeClr val="phClr">
-                <a:shade val="20000"/>
-                <a:satMod val="255000"/>
-              </a:schemeClr>
-            </a:gs>
-          </a:gsLst>
-          <a:path path="circle">
-            <a:fillToRect l="50000" t="-80000" r="50000" b="180000"/>
-          </a:path>
-        </a:gradFill>
-        <a:gradFill rotWithShape="1">
-          <a:gsLst>
-            <a:gs pos="0">
-              <a:schemeClr val="phClr">
-                <a:tint val="80000"/>
-                <a:satMod val="300000"/>
-              </a:schemeClr>
-            </a:gs>
-            <a:gs pos="100000">
-              <a:schemeClr val="phClr">
-                <a:shade val="30000"/>
-                <a:satMod val="200000"/>
-              </a:schemeClr>
-            </a:gs>
-          </a:gsLst>
-          <a:path path="circle">
-            <a:fillToRect l="50000" t="50000" r="50000" b="50000"/>
-          </a:path>
-        </a:gradFill>
-      </a:bgFillStyleLst>
-    </a:fmtScheme>
-  </a:themeElements>
-</a:theme>
 </file>
--- a/Fase 2/Evidencias Grupales/Proyecto Campus Seguro - Presentación Capstone (1).pptx
+++ b/Fase 2/Evidencias Grupales/Proyecto Campus Seguro - Presentación Capstone (1).pptx
@@ -20110,7 +20110,7 @@
         </p:blipFill>
         <p:spPr>
           <a:xfrm>
-            <a:off x="6110575" y="3958763"/>
+            <a:off x="699200" y="4018288"/>
             <a:ext cx="5319425" cy="1890875"/>
           </a:xfrm>
           <a:prstGeom prst="rect">
@@ -20852,7 +20852,7 @@
         </p:blipFill>
         <p:spPr>
           <a:xfrm>
-            <a:off x="6549098" y="4229212"/>
+            <a:off x="1137723" y="4288737"/>
             <a:ext cx="765116" cy="666750"/>
           </a:xfrm>
           <a:prstGeom prst="rect">
@@ -20872,7 +20872,7 @@
         </p:nvSpPr>
         <p:spPr>
           <a:xfrm>
-            <a:off x="5586298" y="5036475"/>
+            <a:off x="174923" y="5096000"/>
             <a:ext cx="2877900" cy="261600"/>
           </a:xfrm>
           <a:prstGeom prst="rect">
@@ -20938,7 +20938,7 @@
         </p:nvSpPr>
         <p:spPr>
           <a:xfrm>
-            <a:off x="5586312" y="5330437"/>
+            <a:off x="174937" y="5389962"/>
             <a:ext cx="2877900" cy="215400"/>
           </a:xfrm>
           <a:prstGeom prst="rect">
@@ -21004,7 +21004,7 @@
         </p:nvSpPr>
         <p:spPr>
           <a:xfrm>
-            <a:off x="8035125" y="4390113"/>
+            <a:off x="2623750" y="4449638"/>
             <a:ext cx="3262200" cy="985200"/>
           </a:xfrm>
           <a:prstGeom prst="rect">
@@ -21048,7 +21048,31 @@
                 <a:cs typeface="Inter"/>
                 <a:sym typeface="Inter"/>
               </a:rPr>
-              <a:t>Desarrollado en Python con el framework web Django, almacenamiento local SQLite.</a:t>
+              <a:t>Desarrollado en Python con el framework web Django, </a:t>
+            </a:r>
+            <a:r>
+              <a:rPr lang="en-US" sz="1600">
+                <a:solidFill>
+                  <a:schemeClr val="dk1"/>
+                </a:solidFill>
+                <a:latin typeface="Inter"/>
+                <a:ea typeface="Inter"/>
+                <a:cs typeface="Inter"/>
+                <a:sym typeface="Inter"/>
+              </a:rPr>
+              <a:t>base de datos</a:t>
+            </a:r>
+            <a:r>
+              <a:rPr b="0" i="0" lang="en-US" sz="1600" u="none" cap="none" strike="noStrike">
+                <a:solidFill>
+                  <a:schemeClr val="dk1"/>
+                </a:solidFill>
+                <a:latin typeface="Inter"/>
+                <a:ea typeface="Inter"/>
+                <a:cs typeface="Inter"/>
+                <a:sym typeface="Inter"/>
+              </a:rPr>
+              <a:t> SQLite.</a:t>
             </a:r>
             <a:endParaRPr b="0" i="0" sz="2100" u="none" cap="none" strike="noStrike">
               <a:solidFill>
@@ -21476,7 +21500,7 @@
         </p:blipFill>
         <p:spPr>
           <a:xfrm>
-            <a:off x="6669415" y="4333991"/>
+            <a:off x="1258040" y="4393516"/>
             <a:ext cx="524650" cy="457201"/>
           </a:xfrm>
           <a:prstGeom prst="rect">
@@ -21503,8 +21527,8 @@
         </p:blipFill>
         <p:spPr>
           <a:xfrm>
-            <a:off x="778900" y="3925412"/>
-            <a:ext cx="5236400" cy="1890875"/>
+            <a:off x="6110575" y="4018275"/>
+            <a:ext cx="5319425" cy="1890900"/>
           </a:xfrm>
           <a:prstGeom prst="rect">
             <a:avLst/>
@@ -21530,7 +21554,7 @@
         </p:blipFill>
         <p:spPr>
           <a:xfrm>
-            <a:off x="1208725" y="4087413"/>
+            <a:off x="6623425" y="4180288"/>
             <a:ext cx="666750" cy="666750"/>
           </a:xfrm>
           <a:prstGeom prst="rect">
@@ -21550,7 +21574,7 @@
         </p:nvSpPr>
         <p:spPr>
           <a:xfrm>
-            <a:off x="707350" y="4792025"/>
+            <a:off x="6122050" y="4884900"/>
             <a:ext cx="1669500" cy="523200"/>
           </a:xfrm>
           <a:prstGeom prst="rect">
@@ -21616,7 +21640,7 @@
         </p:nvSpPr>
         <p:spPr>
           <a:xfrm>
-            <a:off x="81700" y="5395988"/>
+            <a:off x="5496400" y="5488863"/>
             <a:ext cx="2920800" cy="215400"/>
           </a:xfrm>
           <a:prstGeom prst="rect">
@@ -21682,7 +21706,7 @@
         </p:nvSpPr>
         <p:spPr>
           <a:xfrm>
-            <a:off x="2612600" y="4092488"/>
+            <a:off x="8027300" y="4185363"/>
             <a:ext cx="3075000" cy="1723800"/>
           </a:xfrm>
           <a:prstGeom prst="rect">
@@ -21756,7 +21780,7 @@
         </p:blipFill>
         <p:spPr>
           <a:xfrm>
-            <a:off x="1313500" y="4185313"/>
+            <a:off x="6728200" y="4278188"/>
             <a:ext cx="457200" cy="457200"/>
           </a:xfrm>
           <a:prstGeom prst="rect">
@@ -24143,7 +24167,7 @@
         </p:blipFill>
         <p:spPr>
           <a:xfrm>
-            <a:off x="776250" y="4216014"/>
+            <a:off x="6286500" y="1987164"/>
             <a:ext cx="5143500" cy="1784746"/>
           </a:xfrm>
           <a:prstGeom prst="rect">
@@ -24163,7 +24187,7 @@
         </p:nvSpPr>
         <p:spPr>
           <a:xfrm>
-            <a:off x="1309650" y="4454139"/>
+            <a:off x="6819900" y="2225289"/>
             <a:ext cx="4590600" cy="223200"/>
           </a:xfrm>
           <a:prstGeom prst="rect">
@@ -24229,7 +24253,7 @@
         </p:nvSpPr>
         <p:spPr>
           <a:xfrm>
-            <a:off x="1042950" y="4825637"/>
+            <a:off x="6553200" y="2596787"/>
             <a:ext cx="4638600" cy="1015800"/>
           </a:xfrm>
           <a:prstGeom prst="rect">
@@ -24302,7 +24326,7 @@
         </p:blipFill>
         <p:spPr>
           <a:xfrm>
-            <a:off x="1007450" y="4427515"/>
+            <a:off x="6517700" y="2198665"/>
             <a:ext cx="261925" cy="276479"/>
           </a:xfrm>
           <a:prstGeom prst="rect">
@@ -24329,7 +24353,7 @@
         </p:blipFill>
         <p:spPr>
           <a:xfrm>
-            <a:off x="6286500" y="1987164"/>
+            <a:off x="776250" y="4216014"/>
             <a:ext cx="5143500" cy="1784746"/>
           </a:xfrm>
           <a:prstGeom prst="rect">
@@ -24349,7 +24373,7 @@
         </p:nvSpPr>
         <p:spPr>
           <a:xfrm>
-            <a:off x="6819900" y="2225289"/>
+            <a:off x="1309650" y="4454139"/>
             <a:ext cx="4590600" cy="223200"/>
           </a:xfrm>
           <a:prstGeom prst="rect">
@@ -24415,7 +24439,7 @@
         </p:nvSpPr>
         <p:spPr>
           <a:xfrm>
-            <a:off x="6553200" y="2596775"/>
+            <a:off x="1042950" y="4825625"/>
             <a:ext cx="4876800" cy="1015800"/>
           </a:xfrm>
           <a:prstGeom prst="rect">
@@ -24512,7 +24536,7 @@
         </p:blipFill>
         <p:spPr>
           <a:xfrm>
-            <a:off x="6507962" y="2198666"/>
+            <a:off x="997712" y="4427516"/>
             <a:ext cx="261925" cy="276479"/>
           </a:xfrm>
           <a:prstGeom prst="rect">
